--- a/examples/chinese-grant-application-demo/outputs/tech-route.pptx
+++ b/examples/chinese-grant-application-demo/outputs/tech-route.pptx
@@ -94,7 +94,7 @@
         <p:spPr>
           <a:xfrm>
             <a:off x="670000" y="2351200"/>
-            <a:ext cx="5518000" cy="430000"/>
+            <a:ext cx="5518000" cy="500000"/>
           </a:xfrm>
           <a:prstGeom prst="roundRect">
             <a:avLst/>
@@ -132,8 +132,8 @@
         </p:nvSpPr>
         <p:spPr>
           <a:xfrm>
-            <a:off x="670000" y="2796200"/>
-            <a:ext cx="5518000" cy="190000"/>
+            <a:off x="670000" y="2841200"/>
+            <a:ext cx="5518000" cy="210000"/>
           </a:xfrm>
           <a:prstGeom prst="rect">
             <a:avLst/>
@@ -158,18 +158,7 @@
                   <a:srgbClr val="59636A"/>
                 </a:solidFill>
               </a:rPr>
-              <a:t>中文项目申请示例：研究内容、科学问题</a:t>
-            </a:r>
-          </a:p>
-          <a:p>
-            <a:pPr algn="ctr"/>
-            <a:r>
-              <a:rPr lang="zh-CN" sz="850">
-                <a:solidFill>
-                  <a:srgbClr val="59636A"/>
-                </a:solidFill>
-              </a:rPr>
-              <a:t>、关键方法与验证输出</a:t>
+              <a:t>中文项目申请示例：研究内容、科学问题、关键方法与验证输出</a:t>
             </a:r>
           </a:p>
         </p:txBody>
@@ -793,8 +782,8 @@
         </p:nvCxnSpPr>
         <p:spPr>
           <a:xfrm>
-            <a:off x="2676236" y="3876698"/>
-            <a:ext cx="2213303" cy="1"/>
+            <a:off x="3782888" y="4284569"/>
+            <a:ext cx="1" cy="251920"/>
           </a:xfrm>
           <a:prstGeom prst="line">
             <a:avLst/>
@@ -814,9 +803,9 @@
           <p:nvPr/>
         </p:nvCxnSpPr>
         <p:spPr>
-          <a:xfrm flipH="1">
-            <a:off x="2307352" y="3876698"/>
-            <a:ext cx="2582187" cy="1271600"/>
+          <a:xfrm>
+            <a:off x="3782888" y="5556169"/>
+            <a:ext cx="1" cy="251920"/>
           </a:xfrm>
           <a:prstGeom prst="line">
             <a:avLst/>
@@ -837,8 +826,8 @@
         </p:nvCxnSpPr>
         <p:spPr>
           <a:xfrm>
-            <a:off x="2307352" y="5148298"/>
-            <a:ext cx="1475535" cy="1"/>
+            <a:off x="3782888" y="6827769"/>
+            <a:ext cx="1" cy="251920"/>
           </a:xfrm>
           <a:prstGeom prst="line">
             <a:avLst/>
@@ -859,8 +848,8 @@
         </p:nvCxnSpPr>
         <p:spPr>
           <a:xfrm>
-            <a:off x="3782888" y="5148298"/>
-            <a:ext cx="1475535" cy="1"/>
+            <a:off x="3782888" y="8099369"/>
+            <a:ext cx="1" cy="251920"/>
           </a:xfrm>
           <a:prstGeom prst="line">
             <a:avLst/>
@@ -873,185 +862,9 @@
           </a:ln>
         </p:spPr>
       </p:cxnSp>
-      <p:cxnSp>
-        <p:nvCxnSpPr>
-          <p:cNvPr id="24" name="Connector 24"/>
-          <p:cNvCxnSpPr/>
-          <p:nvPr/>
-        </p:nvCxnSpPr>
-        <p:spPr>
-          <a:xfrm flipH="1">
-            <a:off x="2307352" y="5148298"/>
-            <a:ext cx="2951071" cy="1271600"/>
-          </a:xfrm>
-          <a:prstGeom prst="line">
-            <a:avLst/>
-          </a:prstGeom>
-          <a:ln w="19050">
-            <a:solidFill>
-              <a:srgbClr val="315C88"/>
-            </a:solidFill>
-            <a:headEnd type="triangle"/>
-          </a:ln>
-        </p:spPr>
-      </p:cxnSp>
-      <p:cxnSp>
-        <p:nvCxnSpPr>
-          <p:cNvPr id="25" name="Connector 25"/>
-          <p:cNvCxnSpPr/>
-          <p:nvPr/>
-        </p:nvCxnSpPr>
-        <p:spPr>
-          <a:xfrm>
-            <a:off x="2307352" y="6419898"/>
-            <a:ext cx="1475535" cy="1"/>
-          </a:xfrm>
-          <a:prstGeom prst="line">
-            <a:avLst/>
-          </a:prstGeom>
-          <a:ln w="19050">
-            <a:solidFill>
-              <a:srgbClr val="315C88"/>
-            </a:solidFill>
-            <a:headEnd type="triangle"/>
-          </a:ln>
-        </p:spPr>
-      </p:cxnSp>
-      <p:cxnSp>
-        <p:nvCxnSpPr>
-          <p:cNvPr id="26" name="Connector 26"/>
-          <p:cNvCxnSpPr/>
-          <p:nvPr/>
-        </p:nvCxnSpPr>
-        <p:spPr>
-          <a:xfrm>
-            <a:off x="3782888" y="6419898"/>
-            <a:ext cx="1475535" cy="1"/>
-          </a:xfrm>
-          <a:prstGeom prst="line">
-            <a:avLst/>
-          </a:prstGeom>
-          <a:ln w="19050">
-            <a:solidFill>
-              <a:srgbClr val="315C88"/>
-            </a:solidFill>
-            <a:headEnd type="triangle"/>
-          </a:ln>
-        </p:spPr>
-      </p:cxnSp>
-      <p:cxnSp>
-        <p:nvCxnSpPr>
-          <p:cNvPr id="27" name="Connector 27"/>
-          <p:cNvCxnSpPr/>
-          <p:nvPr/>
-        </p:nvCxnSpPr>
-        <p:spPr>
-          <a:xfrm flipH="1">
-            <a:off x="2307352" y="6419898"/>
-            <a:ext cx="2951071" cy="1271600"/>
-          </a:xfrm>
-          <a:prstGeom prst="line">
-            <a:avLst/>
-          </a:prstGeom>
-          <a:ln w="19050">
-            <a:solidFill>
-              <a:srgbClr val="315C88"/>
-            </a:solidFill>
-            <a:headEnd type="triangle"/>
-          </a:ln>
-        </p:spPr>
-      </p:cxnSp>
-      <p:cxnSp>
-        <p:nvCxnSpPr>
-          <p:cNvPr id="28" name="Connector 28"/>
-          <p:cNvCxnSpPr/>
-          <p:nvPr/>
-        </p:nvCxnSpPr>
-        <p:spPr>
-          <a:xfrm>
-            <a:off x="2307352" y="7691498"/>
-            <a:ext cx="1475535" cy="1"/>
-          </a:xfrm>
-          <a:prstGeom prst="line">
-            <a:avLst/>
-          </a:prstGeom>
-          <a:ln w="19050">
-            <a:solidFill>
-              <a:srgbClr val="315C88"/>
-            </a:solidFill>
-            <a:headEnd type="triangle"/>
-          </a:ln>
-        </p:spPr>
-      </p:cxnSp>
-      <p:cxnSp>
-        <p:nvCxnSpPr>
-          <p:cNvPr id="29" name="Connector 29"/>
-          <p:cNvCxnSpPr/>
-          <p:nvPr/>
-        </p:nvCxnSpPr>
-        <p:spPr>
-          <a:xfrm>
-            <a:off x="3782888" y="7691498"/>
-            <a:ext cx="1475535" cy="1"/>
-          </a:xfrm>
-          <a:prstGeom prst="line">
-            <a:avLst/>
-          </a:prstGeom>
-          <a:ln w="19050">
-            <a:solidFill>
-              <a:srgbClr val="315C88"/>
-            </a:solidFill>
-            <a:headEnd type="triangle"/>
-          </a:ln>
-        </p:spPr>
-      </p:cxnSp>
-      <p:cxnSp>
-        <p:nvCxnSpPr>
-          <p:cNvPr id="30" name="Connector 30"/>
-          <p:cNvCxnSpPr/>
-          <p:nvPr/>
-        </p:nvCxnSpPr>
-        <p:spPr>
-          <a:xfrm flipH="1">
-            <a:off x="2676236" y="7691498"/>
-            <a:ext cx="2582187" cy="1271600"/>
-          </a:xfrm>
-          <a:prstGeom prst="line">
-            <a:avLst/>
-          </a:prstGeom>
-          <a:ln w="19050">
-            <a:solidFill>
-              <a:srgbClr val="315C88"/>
-            </a:solidFill>
-            <a:headEnd type="triangle"/>
-          </a:ln>
-        </p:spPr>
-      </p:cxnSp>
-      <p:cxnSp>
-        <p:nvCxnSpPr>
-          <p:cNvPr id="31" name="Connector 31"/>
-          <p:cNvCxnSpPr/>
-          <p:nvPr/>
-        </p:nvCxnSpPr>
-        <p:spPr>
-          <a:xfrm>
-            <a:off x="2676236" y="8963098"/>
-            <a:ext cx="2213303" cy="1"/>
-          </a:xfrm>
-          <a:prstGeom prst="line">
-            <a:avLst/>
-          </a:prstGeom>
-          <a:ln w="19050">
-            <a:solidFill>
-              <a:srgbClr val="315C88"/>
-            </a:solidFill>
-            <a:headEnd type="triangle"/>
-          </a:ln>
-        </p:spPr>
-      </p:cxnSp>
-      <p:sp>
-        <p:nvSpPr>
-          <p:cNvPr id="32" name="Node objective_need"/>
+      <p:sp>
+        <p:nvSpPr>
+          <p:cNvPr id="24" name="Node objective_need"/>
           <p:cNvSpPr/>
           <p:nvPr/>
         </p:nvSpPr>
@@ -1078,7 +891,7 @@
           <a:p>
             <a:pPr algn="ctr"/>
             <a:r>
-              <a:rPr lang="zh-CN" sz="980">
+              <a:rPr lang="zh-CN" sz="930">
                 <a:solidFill>
                   <a:srgbClr val="172033"/>
                 </a:solidFill>
@@ -1090,7 +903,7 @@
       </p:sp>
       <p:sp>
         <p:nvSpPr>
-          <p:cNvPr id="33" name="Node objective_goal"/>
+          <p:cNvPr id="25" name="Node objective_goal"/>
           <p:cNvSpPr/>
           <p:nvPr/>
         </p:nvSpPr>
@@ -1117,7 +930,7 @@
           <a:p>
             <a:pPr algn="ctr"/>
             <a:r>
-              <a:rPr lang="zh-CN" sz="980">
+              <a:rPr lang="zh-CN" sz="930">
                 <a:solidFill>
                   <a:srgbClr val="172033"/>
                 </a:solidFill>
@@ -1129,7 +942,7 @@
       </p:sp>
       <p:sp>
         <p:nvSpPr>
-          <p:cNvPr id="34" name="Node content_data"/>
+          <p:cNvPr id="26" name="Node content_data"/>
           <p:cNvSpPr/>
           <p:nvPr/>
         </p:nvSpPr>
@@ -1156,7 +969,7 @@
           <a:p>
             <a:pPr algn="ctr"/>
             <a:r>
-              <a:rPr lang="zh-CN" sz="980">
+              <a:rPr lang="zh-CN" sz="930">
                 <a:solidFill>
                   <a:srgbClr val="172033"/>
                 </a:solidFill>
@@ -1168,7 +981,7 @@
       </p:sp>
       <p:sp>
         <p:nvSpPr>
-          <p:cNvPr id="35" name="Node content_model"/>
+          <p:cNvPr id="27" name="Node content_model"/>
           <p:cNvSpPr/>
           <p:nvPr/>
         </p:nvSpPr>
@@ -1195,7 +1008,7 @@
           <a:p>
             <a:pPr algn="ctr"/>
             <a:r>
-              <a:rPr lang="zh-CN" sz="980">
+              <a:rPr lang="zh-CN" sz="930">
                 <a:solidFill>
                   <a:srgbClr val="172033"/>
                 </a:solidFill>
@@ -1207,7 +1020,7 @@
       </p:sp>
       <p:sp>
         <p:nvSpPr>
-          <p:cNvPr id="36" name="Node content_platform"/>
+          <p:cNvPr id="28" name="Node content_platform"/>
           <p:cNvSpPr/>
           <p:nvPr/>
         </p:nvSpPr>
@@ -1234,7 +1047,7 @@
           <a:p>
             <a:pPr algn="ctr"/>
             <a:r>
-              <a:rPr lang="zh-CN" sz="980">
+              <a:rPr lang="zh-CN" sz="930">
                 <a:solidFill>
                   <a:srgbClr val="172033"/>
                 </a:solidFill>
@@ -1246,7 +1059,7 @@
       </p:sp>
       <p:sp>
         <p:nvSpPr>
-          <p:cNvPr id="37" name="Node question_feature"/>
+          <p:cNvPr id="29" name="Node question_feature"/>
           <p:cNvSpPr/>
           <p:nvPr/>
         </p:nvSpPr>
@@ -1273,7 +1086,7 @@
           <a:p>
             <a:pPr algn="ctr"/>
             <a:r>
-              <a:rPr lang="zh-CN" sz="980">
+              <a:rPr lang="zh-CN" sz="930">
                 <a:solidFill>
                   <a:srgbClr val="172033"/>
                 </a:solidFill>
@@ -1285,7 +1098,7 @@
       </p:sp>
       <p:sp>
         <p:nvSpPr>
-          <p:cNvPr id="38" name="Node question_general"/>
+          <p:cNvPr id="30" name="Node question_general"/>
           <p:cNvSpPr/>
           <p:nvPr/>
         </p:nvSpPr>
@@ -1312,7 +1125,7 @@
           <a:p>
             <a:pPr algn="ctr"/>
             <a:r>
-              <a:rPr lang="zh-CN" sz="980">
+              <a:rPr lang="zh-CN" sz="930">
                 <a:solidFill>
                   <a:srgbClr val="172033"/>
                 </a:solidFill>
@@ -1324,7 +1137,7 @@
       </p:sp>
       <p:sp>
         <p:nvSpPr>
-          <p:cNvPr id="39" name="Node question_trust"/>
+          <p:cNvPr id="31" name="Node question_trust"/>
           <p:cNvSpPr/>
           <p:nvPr/>
         </p:nvSpPr>
@@ -1351,7 +1164,7 @@
           <a:p>
             <a:pPr algn="ctr"/>
             <a:r>
-              <a:rPr lang="zh-CN" sz="980">
+              <a:rPr lang="zh-CN" sz="930">
                 <a:solidFill>
                   <a:srgbClr val="172033"/>
                 </a:solidFill>
@@ -1363,7 +1176,7 @@
       </p:sp>
       <p:sp>
         <p:nvSpPr>
-          <p:cNvPr id="40" name="Node method_fusion"/>
+          <p:cNvPr id="32" name="Node method_fusion"/>
           <p:cNvSpPr/>
           <p:nvPr/>
         </p:nvSpPr>
@@ -1390,7 +1203,7 @@
           <a:p>
             <a:pPr algn="ctr"/>
             <a:r>
-              <a:rPr lang="zh-CN" sz="980">
+              <a:rPr lang="zh-CN" sz="930">
                 <a:solidFill>
                   <a:srgbClr val="172033"/>
                 </a:solidFill>
@@ -1402,7 +1215,7 @@
       </p:sp>
       <p:sp>
         <p:nvSpPr>
-          <p:cNvPr id="41" name="Node method_explain"/>
+          <p:cNvPr id="33" name="Node method_explain"/>
           <p:cNvSpPr/>
           <p:nvPr/>
         </p:nvSpPr>
@@ -1429,7 +1242,7 @@
           <a:p>
             <a:pPr algn="ctr"/>
             <a:r>
-              <a:rPr lang="zh-CN" sz="980">
+              <a:rPr lang="zh-CN" sz="930">
                 <a:solidFill>
                   <a:srgbClr val="172033"/>
                 </a:solidFill>
@@ -1441,7 +1254,7 @@
       </p:sp>
       <p:sp>
         <p:nvSpPr>
-          <p:cNvPr id="42" name="Node method_loop"/>
+          <p:cNvPr id="34" name="Node method_loop"/>
           <p:cNvSpPr/>
           <p:nvPr/>
         </p:nvSpPr>
@@ -1468,7 +1281,7 @@
           <a:p>
             <a:pPr algn="ctr"/>
             <a:r>
-              <a:rPr lang="zh-CN" sz="980">
+              <a:rPr lang="zh-CN" sz="930">
                 <a:solidFill>
                   <a:srgbClr val="172033"/>
                 </a:solidFill>
@@ -1480,7 +1293,7 @@
       </p:sp>
       <p:sp>
         <p:nvSpPr>
-          <p:cNvPr id="43" name="Node validation_metrics"/>
+          <p:cNvPr id="35" name="Node validation_metrics"/>
           <p:cNvSpPr/>
           <p:nvPr/>
         </p:nvSpPr>
@@ -1507,7 +1320,7 @@
           <a:p>
             <a:pPr algn="ctr"/>
             <a:r>
-              <a:rPr lang="zh-CN" sz="980">
+              <a:rPr lang="zh-CN" sz="930">
                 <a:solidFill>
                   <a:srgbClr val="172033"/>
                 </a:solidFill>
@@ -1519,7 +1332,7 @@
       </p:sp>
       <p:sp>
         <p:nvSpPr>
-          <p:cNvPr id="44" name="Node validation_demo"/>
+          <p:cNvPr id="36" name="Node validation_demo"/>
           <p:cNvSpPr/>
           <p:nvPr/>
         </p:nvSpPr>
@@ -1546,7 +1359,7 @@
           <a:p>
             <a:pPr algn="ctr"/>
             <a:r>
-              <a:rPr lang="zh-CN" sz="980">
+              <a:rPr lang="zh-CN" sz="930">
                 <a:solidFill>
                   <a:srgbClr val="172033"/>
                 </a:solidFill>
